--- a/docs/MedSignal.pptx
+++ b/docs/MedSignal.pptx
@@ -1357,7 +1357,7 @@
           <a:lstStyle/>
           <a:p>
             <a:r>
-              <a:t>第一个 Demo。接入 EEG 设备，MedSignal 对脑电做频域分析，输出压力、睡眠等五个维度的客观指标。张先生的“睡不好”第一次有了数字。当指标异常，它主动预警，并自动匹配到相关医疗待遇。这背后是 77 项引擎测试在支撑。</a:t>
+              <a:t>第一个 Demo。接入 EEG 设备，MedSignal 对脑电做频域分析，输出压力、睡眠等五个维度的客观指标。张先生的“睡不好”第一次有了数字。当指标异常，它主动预警，并自动匹配到相关医疗待遇。引擎已在双源真实公开数据集上验证：PhysioNet 运动想象数据集 + EEGEmotions-27 情绪数据集，加上 289 项单元测试在支撑。</a:t>
             </a:r>
           </a:p>
         </p:txBody>
@@ -1567,7 +1567,7 @@
           <a:lstStyle/>
           <a:p>
             <a:r>
-              <a:t>第四个 Demo 是信息连接层。一张票据上传，报销计算七步走；政策匹配按能省多少钱排序，每一条都有政策原文；更关键的是多智能体协作——当他同时问“脑电异常怎么省钱”，系统会并行调度脑电卫士和政策参谋，一次回答两个问题。</a:t>
+              <a:t>第四个 Demo 是信息连接层。一张票据上传，报销计算七步走；政策匹配按能省多少钱排序，每一条都有政策原文；多智能体协作——当他同时问“脑电异常怎么省钱”，系统会并行调度脑电卫士和政策参谋，一次回答两个问题。最新能力：动态用户管理，现场新增一个用户，不到十秒，对话、健康画像、数字人体档案全站联动；连续对话会话持久化，服务重启后历史可回放。</a:t>
             </a:r>
           </a:p>
         </p:txBody>
@@ -17385,7 +17385,7 @@
                 <a:ea typeface="Microsoft YaHei"/>
                 <a:cs typeface="Microsoft YaHei"/>
               </a:rPr>
-              <a:t>用户输入 → 编排器 → 多智能体并行 → 结果聚合 → 用户</a:t>
+              <a:t>用户输入 → 编排器 → 多智能体并行 → 结果聚合 → 用户 · 会话持久化 · 动态用户全站联动</a:t>
             </a:r>
           </a:p>
         </p:txBody>
@@ -17809,6 +17809,20 @@
               <a:t>五频段 δ / θ / α / β / γ</a:t>
             </a:r>
           </a:p>
+          <a:p>
+            <a:pPr algn="l"/>
+            <a:r>
+              <a:rPr sz="1150" b="0">
+                <a:solidFill>
+                  <a:srgbClr val="2D3748"/>
+                </a:solidFill>
+                <a:latin typeface="Microsoft YaHei"/>
+                <a:ea typeface="Microsoft YaHei"/>
+                <a:cs typeface="Microsoft YaHei"/>
+              </a:rPr>
+              <a:t>双源真实数据集验证</a:t>
+            </a:r>
+          </a:p>
         </p:txBody>
       </p:sp>
       <p:sp>
@@ -18929,7 +18943,7 @@
                 <a:ea typeface="Microsoft YaHei"/>
                 <a:cs typeface="Microsoft YaHei"/>
               </a:rPr>
-              <a:t>✓ 频域分析引擎 · 77 项单元测试全部通过</a:t>
+              <a:t>✓ 双源真实数据集 · PhysioNet 运动想象 + EEGEmotions-27 情绪 · 289 项测试全绿</a:t>
             </a:r>
           </a:p>
         </p:txBody>
@@ -24072,7 +24086,7 @@
         <p:spPr>
           <a:xfrm>
             <a:off x="457200" y="5120640"/>
-            <a:ext cx="11274552" cy="685800"/>
+            <a:ext cx="11274552" cy="566928"/>
           </a:xfrm>
           <a:prstGeom prst="roundRect">
             <a:avLst>
@@ -24116,6 +24130,63 @@
                 <a:cs typeface="Microsoft YaHei"/>
               </a:rPr>
               <a:t>权益问答 · 一句话查清：参保类型 / 账户余额 / 报销比例 · 主动提醒缴费年限</a:t>
+            </a:r>
+          </a:p>
+        </p:txBody>
+      </p:sp>
+      <p:sp>
+        <p:nvSpPr>
+          <p:cNvPr id="37" name="Rounded Rectangle 36"/>
+          <p:cNvSpPr/>
+          <p:nvPr/>
+        </p:nvSpPr>
+        <p:spPr>
+          <a:xfrm>
+            <a:off x="457200" y="5870448"/>
+            <a:ext cx="11274552" cy="621792"/>
+          </a:xfrm>
+          <a:prstGeom prst="roundRect">
+            <a:avLst>
+              <a:gd name="adj" fmla="val 10000"/>
+            </a:avLst>
+          </a:prstGeom>
+          <a:solidFill>
+            <a:srgbClr val="38A169"/>
+          </a:solidFill>
+          <a:ln>
+            <a:noFill/>
+          </a:ln>
+          <a:effectLst/>
+        </p:spPr>
+        <p:style>
+          <a:lnRef idx="1">
+            <a:schemeClr val="accent1"/>
+          </a:lnRef>
+          <a:fillRef idx="3">
+            <a:schemeClr val="accent1"/>
+          </a:fillRef>
+          <a:effectRef idx="2">
+            <a:schemeClr val="accent1"/>
+          </a:effectRef>
+          <a:fontRef idx="minor">
+            <a:schemeClr val="lt1"/>
+          </a:fontRef>
+        </p:style>
+        <p:txBody>
+          <a:bodyPr rtlCol="0" anchor="ctr" wrap="square" lIns="63500" rIns="63500" tIns="25400" bIns="25400"/>
+          <a:lstStyle/>
+          <a:p>
+            <a:pPr algn="ctr"/>
+            <a:r>
+              <a:rPr sz="1200" b="1">
+                <a:solidFill>
+                  <a:srgbClr val="FFFFFF"/>
+                </a:solidFill>
+                <a:latin typeface="Microsoft YaHei"/>
+                <a:ea typeface="Microsoft YaHei"/>
+                <a:cs typeface="Microsoft YaHei"/>
+              </a:rPr>
+              <a:t>现场演示 · 动态新增用户 → 对话/健康画像/数字人体档案全站即时联动（&lt; 10 秒）· 会话持久化重启可回放</a:t>
             </a:r>
           </a:p>
         </p:txBody>

--- a/docs/MedSignal.pptx
+++ b/docs/MedSignal.pptx
@@ -1567,7 +1567,7 @@
           <a:lstStyle/>
           <a:p>
             <a:r>
-              <a:t>第四个 Demo 是信息连接层。一张票据上传，报销计算七步走；政策匹配按能省多少钱排序，每一条都有政策原文；多智能体协作——当他同时问“脑电异常怎么省钱”，系统会并行调度脑电卫士和政策参谋，一次回答两个问题。最新能力：动态用户管理，现场新增一个用户，不到十秒，对话、健康画像、数字人体档案全站联动；连续对话会话持久化，服务重启后历史可回放。</a:t>
+              <a:t>第四个 Demo 是信息连接层。一张票据上传，报销计算七步走；政策匹配按能省多少钱排序，每一条都有政策原文；多智能体协作——当他同时问“脑电异常怎么省钱”，系统会并行调度脑电卫士和政策参谋，一次回答两个问题。动态用户管理，现场新增一个用户，不到十秒，对话、健康画像、数字人体档案全站联动；连续对话会话持久化，服务重启后历史可回放。另外我们上线了运营管理后台：全用户使用统计与画像分析，支撑精准政策传达、病情告知等服务运营。</a:t>
             </a:r>
           </a:p>
         </p:txBody>
@@ -24142,8 +24142,8 @@
         </p:nvSpPr>
         <p:spPr>
           <a:xfrm>
-            <a:off x="457200" y="5870448"/>
-            <a:ext cx="11274552" cy="621792"/>
+            <a:off x="457200" y="5760720"/>
+            <a:ext cx="11274552" cy="530352"/>
           </a:xfrm>
           <a:prstGeom prst="roundRect">
             <a:avLst>
@@ -24187,6 +24187,63 @@
                 <a:cs typeface="Microsoft YaHei"/>
               </a:rPr>
               <a:t>现场演示 · 动态新增用户 → 对话/健康画像/数字人体档案全站即时联动（&lt; 10 秒）· 会话持久化重启可回放</a:t>
+            </a:r>
+          </a:p>
+        </p:txBody>
+      </p:sp>
+      <p:sp>
+        <p:nvSpPr>
+          <p:cNvPr id="38" name="Rounded Rectangle 37"/>
+          <p:cNvSpPr/>
+          <p:nvPr/>
+        </p:nvSpPr>
+        <p:spPr>
+          <a:xfrm>
+            <a:off x="457200" y="6382512"/>
+            <a:ext cx="11274552" cy="384048"/>
+          </a:xfrm>
+          <a:prstGeom prst="roundRect">
+            <a:avLst>
+              <a:gd name="adj" fmla="val 10000"/>
+            </a:avLst>
+          </a:prstGeom>
+          <a:solidFill>
+            <a:srgbClr val="1A365D"/>
+          </a:solidFill>
+          <a:ln>
+            <a:noFill/>
+          </a:ln>
+          <a:effectLst/>
+        </p:spPr>
+        <p:style>
+          <a:lnRef idx="1">
+            <a:schemeClr val="accent1"/>
+          </a:lnRef>
+          <a:fillRef idx="3">
+            <a:schemeClr val="accent1"/>
+          </a:fillRef>
+          <a:effectRef idx="2">
+            <a:schemeClr val="accent1"/>
+          </a:effectRef>
+          <a:fontRef idx="minor">
+            <a:schemeClr val="lt1"/>
+          </a:fontRef>
+        </p:style>
+        <p:txBody>
+          <a:bodyPr rtlCol="0" anchor="ctr" wrap="square" lIns="63500" rIns="63500" tIns="25400" bIns="25400"/>
+          <a:lstStyle/>
+          <a:p>
+            <a:pPr algn="ctr"/>
+            <a:r>
+              <a:rPr sz="1100" b="1">
+                <a:solidFill>
+                  <a:srgbClr val="FFFFFF"/>
+                </a:solidFill>
+                <a:latin typeface="Microsoft YaHei"/>
+                <a:ea typeface="Microsoft YaHei"/>
+                <a:cs typeface="Microsoft YaHei"/>
+              </a:rPr>
+              <a:t>运营管理后台 · 全用户使用统计 + 画像分析 → 精准政策传达 / 病情告知 / 营销推送</a:t>
             </a:r>
           </a:p>
         </p:txBody>
